--- a/5 AI4Chemistry.pptx
+++ b/5 AI4Chemistry.pptx
@@ -19329,15 +19329,22 @@
           </a:p>
           <a:p>
             <a:r>
-              <a:rPr lang="en-US" altLang="zh-CN" sz="2400" dirty="0">
+              <a:rPr lang="en-US" altLang="zh-CN" sz="2400">
                 <a:solidFill>
                   <a:schemeClr val="bg1">
                     <a:lumMod val="50000"/>
                   </a:schemeClr>
                 </a:solidFill>
               </a:rPr>
-              <a:t>Transformer</a:t>
+              <a:t>Transformers</a:t>
             </a:r>
+            <a:endParaRPr lang="en-US" altLang="zh-CN" sz="2400" dirty="0">
+              <a:solidFill>
+                <a:schemeClr val="bg1">
+                  <a:lumMod val="50000"/>
+                </a:schemeClr>
+              </a:solidFill>
+            </a:endParaRPr>
           </a:p>
           <a:p>
             <a:r>
